--- a/validation/bakuzis_stress_v2/release_20261030/deck/2026-10-29_fvs-modern-catalog-deck_DRAFT.pptx
+++ b/validation/bakuzis_stress_v2/release_20261030/deck/2026-10-29_fvs-modern-catalog-deck_DRAFT.pptx
@@ -4461,7 +4461,7 @@
                 </a:solidFill>
                 <a:latin typeface="Calibri"/>
               </a:rPr>
-              <a:t>▪  No new engine runs; recomputed from the trajectory level data (stress_catalog.R, Cardinal jobs 15990793, 16003647 and 16016080).</a:t>
+              <a:t>▪  No new engine runs; recomputed from the trajectory level data (stress_catalog.R, Cardinal jobs 15990793, 16003647, 16016080 and 16033492).</a:t>
             </a:r>
           </a:p>
           <a:p>
@@ -4560,7 +4560,7 @@
                 </a:solidFill>
                 <a:latin typeface="Calibri"/>
               </a:rPr>
-              <a:t>Source: fvs-modern main, validation/bakuzis_stress_v2/ (gates_v6, stress_v6) and config/catalog/ (October 30, 2026, catalog version 1.2.0)</a:t>
+              <a:t>Source: fvs-modern main, validation/bakuzis_stress_v2/ (gates_v8, stress_v8) and config/catalog/ (October 30, 2026, catalog version 1.2.0, catalog v8)</a:t>
             </a:r>
           </a:p>
         </p:txBody>
@@ -4744,7 +4744,7 @@
                 </a:solidFill>
                 <a:latin typeface="Calibri"/>
               </a:rPr>
-              <a:t>No verdict overturned; 7 of 23 admissible and 8 of 49 not admissible arms fragile</a:t>
+              <a:t>No verdict overturned; 6 of 23 admissible and 8 of 49 not admissible arms fragile</a:t>
             </a:r>
           </a:p>
         </p:txBody>
@@ -4783,7 +4783,7 @@
         </p:nvGraphicFramePr>
         <p:xfrm>
           <a:off x="6217920" y="1188720"/>
-          <a:ext cx="5669280" cy="2194560"/>
+          <a:ext cx="5669280" cy="1920240"/>
         </p:xfrm>
         <a:graphic>
           <a:graphicData uri="http://schemas.openxmlformats.org/drawingml/2006/table">
@@ -5046,7 +5046,7 @@
                           </a:solidFill>
                           <a:latin typeface="Calibri"/>
                         </a:rPr>
-                        <a:t>0.89</a:t>
+                        <a:t>0.85</a:t>
                       </a:r>
                     </a:p>
                   </a:txBody>
@@ -5293,77 +5293,6 @@
                   </a:tcPr>
                 </a:tc>
               </a:tr>
-              <a:tr h="274320">
-                <a:tc>
-                  <a:txBody>
-                    <a:bodyPr/>
-                    <a:lstStyle/>
-                    <a:p>
-                      <a:pPr algn="ctr"/>
-                      <a:r>
-                        <a:rPr sz="1200" b="0">
-                          <a:solidFill>
-                            <a:srgbClr val="222222"/>
-                          </a:solidFill>
-                          <a:latin typeface="Calibri"/>
-                        </a:rPr>
-                        <a:t>WS calibrated native</a:t>
-                      </a:r>
-                    </a:p>
-                  </a:txBody>
-                  <a:tcPr marT="18288" marB="18288" anchor="ctr">
-                    <a:solidFill>
-                      <a:srgbClr val="FFFFFF"/>
-                    </a:solidFill>
-                  </a:tcPr>
-                </a:tc>
-                <a:tc>
-                  <a:txBody>
-                    <a:bodyPr/>
-                    <a:lstStyle/>
-                    <a:p>
-                      <a:pPr algn="ctr"/>
-                      <a:r>
-                        <a:rPr sz="1200" b="0">
-                          <a:solidFill>
-                            <a:srgbClr val="222222"/>
-                          </a:solidFill>
-                          <a:latin typeface="Calibri"/>
-                        </a:rPr>
-                        <a:t>0.88</a:t>
-                      </a:r>
-                    </a:p>
-                  </a:txBody>
-                  <a:tcPr marT="18288" marB="18288" anchor="ctr">
-                    <a:solidFill>
-                      <a:srgbClr val="FFFFFF"/>
-                    </a:solidFill>
-                  </a:tcPr>
-                </a:tc>
-                <a:tc>
-                  <a:txBody>
-                    <a:bodyPr/>
-                    <a:lstStyle/>
-                    <a:p>
-                      <a:pPr algn="ctr"/>
-                      <a:r>
-                        <a:rPr sz="1200" b="0">
-                          <a:solidFill>
-                            <a:srgbClr val="222222"/>
-                          </a:solidFill>
-                          <a:latin typeface="Calibri"/>
-                        </a:rPr>
-                        <a:t>0.50</a:t>
-                      </a:r>
-                    </a:p>
-                  </a:txBody>
-                  <a:tcPr marT="18288" marB="18288" anchor="ctr">
-                    <a:solidFill>
-                      <a:srgbClr val="FFFFFF"/>
-                    </a:solidFill>
-                  </a:tcPr>
-                </a:tc>
-              </a:tr>
             </a:tbl>
           </a:graphicData>
         </a:graphic>
@@ -5402,7 +5331,7 @@
                 </a:solidFill>
                 <a:latin typeface="Calibri"/>
               </a:rPr>
-              <a:t>Recommended variants keep an admissible arm in 100 percent of resamples (ACD, BM, CS, NE, SN), 99 (LS), 89 (WS).</a:t>
+              <a:t>Recommended variants keep an admissible arm in 100 percent of resamples (ACD, BM, CS, NE, SN), 99 (LS), 92 (WS).</a:t>
             </a:r>
           </a:p>
           <a:p>
@@ -5418,7 +5347,7 @@
                 </a:solidFill>
                 <a:latin typeface="Calibri"/>
               </a:rPr>
-              <a:t>Fragile not admissible: CI default native 0.50, SO four arms 0.20 to 0.46, CR calibrated native 0.22, TT calibrated GOMPIT 0.23, EC default native 0.14; all among the 12 arms a 25 percent Reineke tolerance admits, all below even odds.</a:t>
+              <a:t>Fragile not admissible: CI default native 0.50, SO four arms 0.20 to 0.46, CR calibrated native 0.22, TT calibrated GOMPIT 0.23, EC default native 0.13; all among the 12 arms a 25 percent Reineke tolerance admits, all below even odds.</a:t>
             </a:r>
           </a:p>
           <a:p>
@@ -5517,7 +5446,7 @@
                 </a:solidFill>
                 <a:latin typeface="Calibri"/>
               </a:rPr>
-              <a:t>Source: stress_by_arm.csv, stress_by_variant.csv (job 16016080)</a:t>
+              <a:t>Source: stress_by_arm.csv, stress_by_variant.csv (job 16033492)</a:t>
             </a:r>
           </a:p>
         </p:txBody>
@@ -6130,7 +6059,7 @@
                 </a:solidFill>
                 <a:latin typeface="Calibri"/>
               </a:rPr>
-              <a:t>Source: fvs-modern main, validation/bakuzis_stress_v2/ (gates_v6, stress_v6) and config/catalog/ (October 30, 2026, catalog version 1.2.0)</a:t>
+              <a:t>Source: fvs-modern main, validation/bakuzis_stress_v2/ (gates_v8, stress_v8) and config/catalog/ (October 30, 2026, catalog version 1.2.0, catalog v8)</a:t>
             </a:r>
           </a:p>
         </p:txBody>
@@ -6417,7 +6346,7 @@
                 </a:solidFill>
                 <a:latin typeface="Calibri"/>
               </a:rPr>
-              <a:t>▪  The year zero failures of the first catalog are explained (null TPA_UNADJ records filled as 6.0 TPA trees) and gone; the regenerated catalog changed no verdict. The October 30 overlay fix changed four verdict fields (EM and WC least bad arm, WC alternative rule, NE stability label) and no status.</a:t>
+              <a:t>▪  The year zero failures of the first catalog are explained (null TPA_UNADJ records filled as 6.0 TPA trees) and gone; the regenerated catalog changed no verdict. The October 30 overlay fix changed four verdict fields (EM and WC least bad arm, WC alternative rule, NE stability label), and the plot-size expansion fix (v8) changed the WC alternative rule back and the WS stability label; no status changed.</a:t>
             </a:r>
           </a:p>
           <a:p>
@@ -6532,7 +6461,7 @@
                 </a:solidFill>
                 <a:latin typeface="Calibri"/>
               </a:rPr>
-              <a:t>Source: fvs-modern main, validation/bakuzis_stress_v2/ (gates_v6, stress_v6) and config/catalog/ (October 30, 2026, catalog version 1.2.0); implementation-notes.md</a:t>
+              <a:t>Source: fvs-modern main, validation/bakuzis_stress_v2/ (gates_v8, stress_v8) and config/catalog/ (October 30, 2026, catalog version 1.2.0, catalog v8); implementation-notes.md</a:t>
             </a:r>
           </a:p>
         </p:txBody>
@@ -6755,7 +6684,7 @@
                 </a:solidFill>
                 <a:latin typeface="Calibri"/>
               </a:rPr>
-              <a:t>▪  GitHub: advanced-forestry-systems/fvs-modern, main (PRs 118 to 137; current catalog in gates_v6). config/catalog/ holds the two tables the selector reads; validation/bakuzis_stress_v2/ holds the memo (Sections 1 to 18), the catalog folder, scorecards, stress test and run index with md5 lists.</a:t>
+              <a:t>▪  GitHub: advanced-forestry-systems/fvs-modern, main (PRs 118 to 137, 144 and 145; current catalog in gates_v8). config/catalog/ holds the two tables the selector reads; validation/bakuzis_stress_v2/ holds the memo (Sections 1 to 19), the catalog folder, scorecards, stress test and run index with md5 lists.</a:t>
             </a:r>
           </a:p>
           <a:p>
@@ -6803,7 +6732,7 @@
                 </a:solidFill>
                 <a:latin typeface="Calibri"/>
               </a:rPr>
-              <a:t>▪  Cardinal jobs: build 15967530, first runs 15976824 and 15984133, regenerated runs 15998817, finalize 16002593, stress 16003647, scorecards 16003648; version 1.2.0 calibrated reruns 16016015, finalize 16016079, stress 16016080, scorecards 16016081.</a:t>
+              <a:t>▪  Cardinal jobs: build 15967530, first runs 15976824 and 15984133, regenerated runs 15998817, finalize 16002593, stress 16003647, scorecards 16003648; version 1.2.0: calibrated reruns 16016015, v8 reruns 16023222, finalize 16023294, stress 16033492, scorecards 16033493.</a:t>
             </a:r>
           </a:p>
         </p:txBody>
@@ -6969,7 +6898,7 @@
                 </a:solidFill>
                 <a:latin typeface="Calibri"/>
               </a:rPr>
-              <a:t>Source: fvs-modern main, validation/bakuzis_stress_v2/ (gates_v6, stress_v6) and config/catalog/ (October 30, 2026, catalog version 1.2.0)</a:t>
+              <a:t>Source: fvs-modern main, validation/bakuzis_stress_v2/ (gates_v8, stress_v8) and config/catalog/ (October 30, 2026, catalog version 1.2.0, catalog v8)</a:t>
             </a:r>
           </a:p>
         </p:txBody>
@@ -7470,7 +7399,7 @@
                 </a:solidFill>
                 <a:latin typeface="Calibri"/>
               </a:rPr>
-              <a:t>Source: fvs-modern main, validation/bakuzis_stress_v2/ (gates_v6, stress_v6) and config/catalog/ (October 30, 2026, catalog version 1.2.0)</a:t>
+              <a:t>Source: fvs-modern main, validation/bakuzis_stress_v2/ (gates_v8, stress_v8) and config/catalog/ (October 30, 2026, catalog version 1.2.0, catalog v8)</a:t>
             </a:r>
           </a:p>
         </p:txBody>
@@ -7693,7 +7622,7 @@
                 </a:solidFill>
                 <a:latin typeface="Calibri"/>
               </a:rPr>
-              <a:t>▪  Stand sample: up to 300 FIA plots per variant from the fvs-conus pairs frame (17 variants; ACD takes NE plots in ME, NH and VT, an assumption). Trees expanded by CONDPROP_UNADJ, species outside the variant relabelled to its other softwood or hardwood code.</a:t>
+              <a:t>▪  Stand sample: up to 300 FIA plots per variant from the fvs-conus pairs frame (17 variants; ACD takes NE plots in ME, NH and VT, an assumption). Trees expanded by the condition's share of each plot size (MICRPROP, SUBPPROP, MACRPROP_UNADJ), species outside the variant relabelled to its other softwood or hardwood code.</a:t>
             </a:r>
           </a:p>
           <a:p>
@@ -7725,7 +7654,7 @@
                 </a:solidFill>
                 <a:latin typeface="Calibri"/>
               </a:rPr>
-              <a:t>▪  Four engine arms x 100 years at a 5 year step, no regeneration (NOAUTOES in EM and IE), no posterior draws. Cardinal arrays 15976824 and 15984133 after library build 15967530 with the GOMPSURV fix; calibrated arms rerun October 30 (array 16016015) after the overlay fix, default arms carried over.</a:t>
+              <a:t>▪  Four engine arms x 100 years at a 5 year step, no regeneration (NOAUTOES in EM and IE), no posterior draws. Cardinal arrays 15976824 and 15984133 after library build 15967530 with the GOMPSURV fix; calibrated arms rerun October 30 (array 16016015) after the overlay fix, then all four arms (array 16023222) after the plot-size expansion fix.</a:t>
             </a:r>
           </a:p>
           <a:p>
@@ -7840,7 +7769,7 @@
                 </a:solidFill>
                 <a:latin typeface="Calibri"/>
               </a:rPr>
-              <a:t>Source: fvs-modern main, validation/bakuzis_stress_v2/ (gates_v6, stress_v6) and config/catalog/ (October 30, 2026, catalog version 1.2.0)</a:t>
+              <a:t>Source: fvs-modern main, validation/bakuzis_stress_v2/ (gates_v8, stress_v8) and config/catalog/ (October 30, 2026, catalog version 1.2.0, catalog v8)</a:t>
             </a:r>
           </a:p>
         </p:txBody>
@@ -8587,7 +8516,7 @@
                 </a:solidFill>
                 <a:latin typeface="Calibri"/>
               </a:rPr>
-              <a:t>Alternative Reineke gate (Wilson upper bound &lt; 25 percent on at least 30 evaluated) is carried beside the primary rule in the gate table and flags eight rule sensitive variants. The catalog ships under the primary rule (decision of October 29, 2026) because the alternative admits western arms by declining to test their self-thinning.</a:t>
+              <a:t>Alternative Reineke gate (Wilson upper bound &lt; 25 percent on at least 30 evaluated) is carried beside the primary rule in the gate table and flags seven rule sensitive variants. The catalog ships under the primary rule (decision of October 29, 2026) because the alternative admits western arms by declining to test their self-thinning.</a:t>
             </a:r>
           </a:p>
         </p:txBody>
@@ -8670,7 +8599,7 @@
                 </a:solidFill>
                 <a:latin typeface="Calibri"/>
               </a:rPr>
-              <a:t>Source: fvs-modern main, validation/bakuzis_stress_v2/ (gates_v6, stress_v6) and config/catalog/ (October 30, 2026, catalog version 1.2.0)</a:t>
+              <a:t>Source: fvs-modern main, validation/bakuzis_stress_v2/ (gates_v8, stress_v8) and config/catalog/ (October 30, 2026, catalog version 1.2.0, catalog v8)</a:t>
             </a:r>
           </a:p>
         </p:txBody>
@@ -9072,7 +9001,7 @@
                 </a:solidFill>
                 <a:latin typeface="Calibri"/>
               </a:rPr>
-              <a:t>Source: fvs-modern main, validation/bakuzis_stress_v2/ (gates_v6, stress_v6) and config/catalog/ (October 30, 2026, catalog version 1.2.0)</a:t>
+              <a:t>Source: fvs-modern main, validation/bakuzis_stress_v2/ (gates_v8, stress_v8) and config/catalog/ (October 30, 2026, catalog version 1.2.0, catalog v8)</a:t>
             </a:r>
           </a:p>
         </p:txBody>
@@ -9351,7 +9280,7 @@
                 </a:solidFill>
                 <a:latin typeface="Calibri"/>
               </a:rPr>
-              <a:t>▪  Magnitude passes almost everywhere: BA p99.9 exceedance at or below 1.7 percent in 14 of 18 variants, SDI never above 4.9 percent, lower bound passes in every arm.</a:t>
+              <a:t>▪  Magnitude passes almost everywhere: BA p99.9 exceedance at or below 1.7 percent in 14 of 18 variants, SDI never above 5.3 percent, lower bound passes in every arm.</a:t>
             </a:r>
           </a:p>
           <a:p>
@@ -9489,7 +9418,7 @@
                 </a:solidFill>
                 <a:latin typeface="Calibri"/>
               </a:rPr>
-              <a:t>Source: fvs-modern main, validation/bakuzis_stress_v2/ (gates_v6, stress_v6) and config/catalog/ (October 30, 2026, catalog version 1.2.0)</a:t>
+              <a:t>Source: fvs-modern main, validation/bakuzis_stress_v2/ (gates_v8, stress_v8) and config/catalog/ (October 30, 2026, catalog version 1.2.0, catalog v8)</a:t>
             </a:r>
           </a:p>
         </p:txBody>
@@ -9752,7 +9681,7 @@
                 </a:solidFill>
                 <a:latin typeface="Calibri"/>
               </a:rPr>
-              <a:t>▪  Exceptions on magnitude: EM native (22 and 22 percent) and EM GOMPIT (8 and 10), LS default (15 and 10), WC native (11 and 18), PN native (34 and 32 on 38 stands).</a:t>
+              <a:t>▪  Exceptions on magnitude: EM native (22 and 22 percent) and EM GOMPIT (8 and 10), LS default (15 and 10), WC native (10 and 19), PN native (34 and 32 on 38 stands).</a:t>
             </a:r>
           </a:p>
           <a:p>
@@ -9768,7 +9697,7 @@
                 </a:solidFill>
                 <a:latin typeface="Calibri"/>
               </a:rPr>
-              <a:t>▪  Reineke failures come in two forms: default native arms that do not self-thin (CA, TT, UT, WC, EM, CR: median slopes -0.83 to -1.46, flag rates 27 to 84 percent), and calibrated GOMPIT arms whose median slope is right (-1.57 to -1.90) but dispersed (14 to 39 percent flagged).</a:t>
+              <a:t>▪  Reineke failures come in two forms: default native arms that do not self-thin (CA, TT, UT, WC, EM, CR: median slopes -0.83 to -1.46, flag rates 27 to 84 percent), and calibrated GOMPIT arms whose median slope is right (-1.56 to -1.90) but dispersed (14 to 39 percent flagged).</a:t>
             </a:r>
           </a:p>
           <a:p>
@@ -9867,7 +9796,7 @@
                 </a:solidFill>
                 <a:latin typeface="Calibri"/>
               </a:rPr>
-              <a:t>Source: fvs-modern main, validation/bakuzis_stress_v2/ (gates_v6, stress_v6) and config/catalog/ (October 30, 2026, catalog version 1.2.0); catalog_gates_by_arm.csv</a:t>
+              <a:t>Source: fvs-modern main, validation/bakuzis_stress_v2/ (gates_v8, stress_v8) and config/catalog/ (October 30, 2026, catalog version 1.2.0, catalog v8); catalog_gates_by_arm.csv</a:t>
             </a:r>
           </a:p>
         </p:txBody>
@@ -10058,7 +9987,7 @@
       </p:sp>
       <p:pic>
         <p:nvPicPr>
-          <p:cNvPr id="5" name="Picture 4" descr="scorecard_20261029_default_native_selfthinning.png"/>
+          <p:cNvPr id="5" name="Picture 4" descr="scorecard_20261030v8_default_native_selfthinning.png"/>
           <p:cNvPicPr>
             <a:picLocks noChangeAspect="1"/>
           </p:cNvPicPr>
@@ -10261,7 +10190,7 @@
                 </a:solidFill>
                 <a:latin typeface="Calibri"/>
               </a:rPr>
-              <a:t>Source: bakuzis_scorecards.R, Cardinal job 16003648 (default arm, unchanged in version 1.2.0)</a:t>
+              <a:t>Source: bakuzis_scorecards.R, Cardinal job 16033493 (catalog v8)</a:t>
             </a:r>
           </a:p>
         </p:txBody>
@@ -10452,7 +10381,7 @@
       </p:sp>
       <p:pic>
         <p:nvPicPr>
-          <p:cNvPr id="5" name="Picture 4" descr="scorecard_20261029_default_gompit_NE_bakuzis_matrix.png"/>
+          <p:cNvPr id="5" name="Picture 4" descr="scorecard_20261030v8_default_gompit_NE_bakuzis_matrix.png"/>
           <p:cNvPicPr>
             <a:picLocks noChangeAspect="1"/>
           </p:cNvPicPr>
@@ -10655,7 +10584,7 @@
                 </a:solidFill>
                 <a:latin typeface="Calibri"/>
               </a:rPr>
-              <a:t>Source: bakuzis_scorecards.R, Cardinal job 16003648 (default arm, unchanged in version 1.2.0)</a:t>
+              <a:t>Source: bakuzis_scorecards.R, Cardinal job 16033493 (catalog v8)</a:t>
             </a:r>
           </a:p>
         </p:txBody>
